--- a/capstone-deck.pptx
+++ b/capstone-deck.pptx
@@ -17,6 +17,7 @@
     <p:sldId id="265" r:id="rId16"/>
     <p:sldId id="266" r:id="rId17"/>
     <p:sldId id="267" r:id="rId18"/>
+    <p:sldId id="268" r:id="rId19"/>
   </p:sldIdLst>
   <p:sldSz cx="12191695" cy="6858000" type="screen4x3"/>
   <p:notesSz cx="6858000" cy="9144000"/>
@@ -3172,7 +3173,7 @@
               </a:defRPr>
             </a:pPr>
             <a:r>
-              <a:t>Slip-Cast Ceramic Ocarina (OCA-001) — Build Packet</a:t>
+              <a:t>Slip-Cast Ceramic Ocarina (OCA-001) — v3 Smoke Test</a:t>
             </a:r>
           </a:p>
         </p:txBody>
@@ -3275,7 +3276,7 @@
               </a:defRPr>
             </a:pPr>
             <a:r>
-              <a:t>Slip-Cast Ceramic Ocarina (OCA-001) — Build Packet  |  Slide 1 of 12</a:t>
+              <a:t>Slip-Cast Ceramic Ocarina (OCA-001) — v3 Smoke Test  |  Slide 1 of 13</a:t>
             </a:r>
           </a:p>
         </p:txBody>
@@ -3371,7 +3372,7 @@
               </a:defRPr>
             </a:pPr>
             <a:r>
-              <a:t>Validation Plan</a:t>
+              <a:t>Images And Screenshots</a:t>
             </a:r>
           </a:p>
         </p:txBody>
@@ -3385,7 +3386,7 @@
         <p:spPr>
           <a:xfrm>
             <a:off x="457200" y="1463040"/>
-            <a:ext cx="11247120" cy="4754880"/>
+            <a:ext cx="5943600" cy="4754880"/>
           </a:xfrm>
           <a:prstGeom prst="rect">
             <a:avLst/>
@@ -3409,7 +3410,7 @@
               </a:defRPr>
             </a:pPr>
             <a:r>
-              <a:t>• A4 = 440 Hz reference check.</a:t>
+              <a:t>• images/exploded-view-concept.png</a:t>
             </a:r>
           </a:p>
           <a:p>
@@ -3424,7 +3425,7 @@
               </a:defRPr>
             </a:pPr>
             <a:r>
-              <a:t>• Tuning targets logged in validation.csv.</a:t>
+              <a:t>• images/hero-concept.png</a:t>
             </a:r>
           </a:p>
           <a:p>
@@ -3439,29 +3440,191 @@
               </a:defRPr>
             </a:pPr>
             <a:r>
-              <a:t>• Critical dimensions verified against design sheet and CAD.</a:t>
-            </a:r>
-          </a:p>
-          <a:p>
-            <a:pPr>
-              <a:spcAft>
-                <a:spcPts val="800"/>
-              </a:spcAft>
-              <a:defRPr sz="2000">
+              <a:t>• images/mold-cross-section-concept.png</a:t>
+            </a:r>
+          </a:p>
+        </p:txBody>
+      </p:sp>
+      <p:pic>
+        <p:nvPicPr>
+          <p:cNvPr id="5" name="Picture 4" descr="exploded-view-concept.png"/>
+          <p:cNvPicPr>
+            <a:picLocks noChangeAspect="1"/>
+          </p:cNvPicPr>
+          <p:nvPr/>
+        </p:nvPicPr>
+        <p:blipFill>
+          <a:blip r:embed="rId2"/>
+          <a:stretch>
+            <a:fillRect/>
+          </a:stretch>
+        </p:blipFill>
+        <p:spPr>
+          <a:xfrm>
+            <a:off x="6737985" y="1463040"/>
+            <a:ext cx="2388870" cy="1783080"/>
+          </a:xfrm>
+          <a:prstGeom prst="rect">
+            <a:avLst/>
+          </a:prstGeom>
+        </p:spPr>
+      </p:pic>
+      <p:sp>
+        <p:nvSpPr>
+          <p:cNvPr id="6" name="TextBox 5"/>
+          <p:cNvSpPr txBox="1"/>
+          <p:nvPr/>
+        </p:nvSpPr>
+        <p:spPr>
+          <a:xfrm>
+            <a:off x="6675120" y="3246120"/>
+            <a:ext cx="2514600" cy="594360"/>
+          </a:xfrm>
+          <a:prstGeom prst="rect">
+            <a:avLst/>
+          </a:prstGeom>
+          <a:noFill/>
+        </p:spPr>
+        <p:txBody>
+          <a:bodyPr wrap="square">
+            <a:spAutoFit/>
+          </a:bodyPr>
+          <a:lstStyle/>
+          <a:p>
+            <a:pPr>
+              <a:defRPr sz="900">
                 <a:solidFill>
                   <a:srgbClr val="445577"/>
                 </a:solidFill>
               </a:defRPr>
             </a:pPr>
             <a:r>
-              <a:t>• Photos and revision notes after each major step.</a:t>
-            </a:r>
-          </a:p>
-        </p:txBody>
-      </p:sp>
-      <p:sp>
-        <p:nvSpPr>
-          <p:cNvPr id="5" name="TextBox 4"/>
+              <a:t>exploded-view-concept.png</a:t>
+            </a:r>
+          </a:p>
+        </p:txBody>
+      </p:sp>
+      <p:pic>
+        <p:nvPicPr>
+          <p:cNvPr id="7" name="Picture 6" descr="hero-concept.png"/>
+          <p:cNvPicPr>
+            <a:picLocks noChangeAspect="1"/>
+          </p:cNvPicPr>
+          <p:nvPr/>
+        </p:nvPicPr>
+        <p:blipFill>
+          <a:blip r:embed="rId3"/>
+          <a:stretch>
+            <a:fillRect/>
+          </a:stretch>
+        </p:blipFill>
+        <p:spPr>
+          <a:xfrm>
+            <a:off x="9252585" y="1463040"/>
+            <a:ext cx="2388870" cy="1783080"/>
+          </a:xfrm>
+          <a:prstGeom prst="rect">
+            <a:avLst/>
+          </a:prstGeom>
+        </p:spPr>
+      </p:pic>
+      <p:sp>
+        <p:nvSpPr>
+          <p:cNvPr id="8" name="TextBox 7"/>
+          <p:cNvSpPr txBox="1"/>
+          <p:nvPr/>
+        </p:nvSpPr>
+        <p:spPr>
+          <a:xfrm>
+            <a:off x="9189720" y="3246120"/>
+            <a:ext cx="2514600" cy="594360"/>
+          </a:xfrm>
+          <a:prstGeom prst="rect">
+            <a:avLst/>
+          </a:prstGeom>
+          <a:noFill/>
+        </p:spPr>
+        <p:txBody>
+          <a:bodyPr wrap="square">
+            <a:spAutoFit/>
+          </a:bodyPr>
+          <a:lstStyle/>
+          <a:p>
+            <a:pPr>
+              <a:defRPr sz="900">
+                <a:solidFill>
+                  <a:srgbClr val="445577"/>
+                </a:solidFill>
+              </a:defRPr>
+            </a:pPr>
+            <a:r>
+              <a:t>hero-concept.png</a:t>
+            </a:r>
+          </a:p>
+        </p:txBody>
+      </p:sp>
+      <p:pic>
+        <p:nvPicPr>
+          <p:cNvPr id="9" name="Picture 8" descr="mold-cross-section-concept.png"/>
+          <p:cNvPicPr>
+            <a:picLocks noChangeAspect="1"/>
+          </p:cNvPicPr>
+          <p:nvPr/>
+        </p:nvPicPr>
+        <p:blipFill>
+          <a:blip r:embed="rId4"/>
+          <a:stretch>
+            <a:fillRect/>
+          </a:stretch>
+        </p:blipFill>
+        <p:spPr>
+          <a:xfrm>
+            <a:off x="6737985" y="3840480"/>
+            <a:ext cx="2388870" cy="1783080"/>
+          </a:xfrm>
+          <a:prstGeom prst="rect">
+            <a:avLst/>
+          </a:prstGeom>
+        </p:spPr>
+      </p:pic>
+      <p:sp>
+        <p:nvSpPr>
+          <p:cNvPr id="10" name="TextBox 9"/>
+          <p:cNvSpPr txBox="1"/>
+          <p:nvPr/>
+        </p:nvSpPr>
+        <p:spPr>
+          <a:xfrm>
+            <a:off x="6675120" y="5623560"/>
+            <a:ext cx="2514600" cy="594360"/>
+          </a:xfrm>
+          <a:prstGeom prst="rect">
+            <a:avLst/>
+          </a:prstGeom>
+          <a:noFill/>
+        </p:spPr>
+        <p:txBody>
+          <a:bodyPr wrap="square">
+            <a:spAutoFit/>
+          </a:bodyPr>
+          <a:lstStyle/>
+          <a:p>
+            <a:pPr>
+              <a:defRPr sz="900">
+                <a:solidFill>
+                  <a:srgbClr val="445577"/>
+                </a:solidFill>
+              </a:defRPr>
+            </a:pPr>
+            <a:r>
+              <a:t>mold-cross-section-concept.png</a:t>
+            </a:r>
+          </a:p>
+        </p:txBody>
+      </p:sp>
+      <p:sp>
+        <p:nvSpPr>
+          <p:cNvPr id="11" name="TextBox 10"/>
           <p:cNvSpPr txBox="1"/>
           <p:nvPr/>
         </p:nvSpPr>
@@ -3489,7 +3652,7 @@
               </a:defRPr>
             </a:pPr>
             <a:r>
-              <a:t>Slip-Cast Ceramic Ocarina (OCA-001) — Build Packet  |  Slide 10 of 12</a:t>
+              <a:t>Slip-Cast Ceramic Ocarina (OCA-001) — v3 Smoke Test  |  Slide 10 of 13</a:t>
             </a:r>
           </a:p>
         </p:txBody>
@@ -3585,7 +3748,7 @@
               </a:defRPr>
             </a:pPr>
             <a:r>
-              <a:t>Open Risks / Decisions</a:t>
+              <a:t>Validation Plan</a:t>
             </a:r>
           </a:p>
         </p:txBody>
@@ -3623,7 +3786,7 @@
               </a:defRPr>
             </a:pPr>
             <a:r>
-              <a:t>• TBDs in design sheet and BOM.</a:t>
+              <a:t>• A4 = 440 Hz reference check.</a:t>
             </a:r>
           </a:p>
           <a:p>
@@ -3638,7 +3801,7 @@
               </a:defRPr>
             </a:pPr>
             <a:r>
-              <a:t>• Supplier price/availability not yet verified.</a:t>
+              <a:t>• Tuning targets logged in validation.csv.</a:t>
             </a:r>
           </a:p>
           <a:p>
@@ -3653,7 +3816,7 @@
               </a:defRPr>
             </a:pPr>
             <a:r>
-              <a:t>• Generated images marked as concept placeholders.</a:t>
+              <a:t>• Critical dimensions verified against design sheet and CAD.</a:t>
             </a:r>
           </a:p>
           <a:p>
@@ -3668,7 +3831,7 @@
               </a:defRPr>
             </a:pPr>
             <a:r>
-              <a:t>• Empirical corrections await measured prototype data.</a:t>
+              <a:t>• Photos and revision notes after each major step.</a:t>
             </a:r>
           </a:p>
         </p:txBody>
@@ -3703,7 +3866,7 @@
               </a:defRPr>
             </a:pPr>
             <a:r>
-              <a:t>Slip-Cast Ceramic Ocarina (OCA-001) — Build Packet  |  Slide 11 of 12</a:t>
+              <a:t>Slip-Cast Ceramic Ocarina (OCA-001) — v3 Smoke Test  |  Slide 11 of 13</a:t>
             </a:r>
           </a:p>
         </p:txBody>
@@ -3799,7 +3962,7 @@
               </a:defRPr>
             </a:pPr>
             <a:r>
-              <a:t>Next Actions</a:t>
+              <a:t>Open Risks / Decisions</a:t>
             </a:r>
           </a:p>
         </p:txBody>
@@ -3837,7 +4000,7 @@
               </a:defRPr>
             </a:pPr>
             <a:r>
-              <a:t>• Replace TBDs with measured/source-backed values.</a:t>
+              <a:t>• TBDs in design sheet and BOM.</a:t>
             </a:r>
           </a:p>
           <a:p>
@@ -3852,7 +4015,7 @@
               </a:defRPr>
             </a:pPr>
             <a:r>
-              <a:t>• Verify live supplier price and availability before buying.</a:t>
+              <a:t>• Supplier price/availability not yet verified.</a:t>
             </a:r>
           </a:p>
           <a:p>
@@ -3867,7 +4030,7 @@
               </a:defRPr>
             </a:pPr>
             <a:r>
-              <a:t>• Export final drawings and visual BOM images.</a:t>
+              <a:t>• Generated images marked as concept placeholders.</a:t>
             </a:r>
           </a:p>
           <a:p>
@@ -3882,7 +4045,7 @@
               </a:defRPr>
             </a:pPr>
             <a:r>
-              <a:t>• Regenerate this deck and print packet after final edits.</a:t>
+              <a:t>• Empirical corrections await measured prototype data.</a:t>
             </a:r>
           </a:p>
         </p:txBody>
@@ -3917,7 +4080,221 @@
               </a:defRPr>
             </a:pPr>
             <a:r>
-              <a:t>Slip-Cast Ceramic Ocarina (OCA-001) — Build Packet  |  Slide 12 of 12</a:t>
+              <a:t>Slip-Cast Ceramic Ocarina (OCA-001) — v3 Smoke Test  |  Slide 12 of 13</a:t>
+            </a:r>
+          </a:p>
+        </p:txBody>
+      </p:sp>
+    </p:spTree>
+  </p:cSld>
+  <p:clrMapOvr>
+    <a:masterClrMapping/>
+  </p:clrMapOvr>
+</p:sld>
+</file>
+
+<file path=ppt/slides/slide13.xml><?xml version="1.0" encoding="utf-8"?>
+<p:sld xmlns:a="http://schemas.openxmlformats.org/drawingml/2006/main" xmlns:p="http://schemas.openxmlformats.org/presentationml/2006/main" xmlns:r="http://schemas.openxmlformats.org/officeDocument/2006/relationships">
+  <p:cSld>
+    <p:spTree>
+      <p:nvGrpSpPr>
+        <p:cNvPr id="1" name=""/>
+        <p:cNvGrpSpPr/>
+        <p:nvPr/>
+      </p:nvGrpSpPr>
+      <p:grpSpPr/>
+      <p:sp>
+        <p:nvSpPr>
+          <p:cNvPr id="2" name="Rectangle 1"/>
+          <p:cNvSpPr/>
+          <p:nvPr/>
+        </p:nvSpPr>
+        <p:spPr>
+          <a:xfrm>
+            <a:off x="0" y="0"/>
+            <a:ext cx="12191695" cy="411480"/>
+          </a:xfrm>
+          <a:prstGeom prst="rect">
+            <a:avLst/>
+          </a:prstGeom>
+          <a:solidFill>
+            <a:srgbClr val="1F3A68"/>
+          </a:solidFill>
+          <a:ln>
+            <a:noFill/>
+          </a:ln>
+        </p:spPr>
+        <p:style>
+          <a:lnRef idx="1">
+            <a:schemeClr val="accent1"/>
+          </a:lnRef>
+          <a:fillRef idx="3">
+            <a:schemeClr val="accent1"/>
+          </a:fillRef>
+          <a:effectRef idx="2">
+            <a:schemeClr val="accent1"/>
+          </a:effectRef>
+          <a:fontRef idx="minor">
+            <a:schemeClr val="lt1"/>
+          </a:fontRef>
+        </p:style>
+        <p:txBody>
+          <a:bodyPr rtlCol="0" anchor="ctr"/>
+          <a:lstStyle/>
+          <a:p>
+            <a:pPr algn="ctr"/>
+          </a:p>
+        </p:txBody>
+      </p:sp>
+      <p:sp>
+        <p:nvSpPr>
+          <p:cNvPr id="3" name="TextBox 2"/>
+          <p:cNvSpPr txBox="1"/>
+          <p:nvPr/>
+        </p:nvSpPr>
+        <p:spPr>
+          <a:xfrm>
+            <a:off x="457200" y="548640"/>
+            <a:ext cx="11247120" cy="914400"/>
+          </a:xfrm>
+          <a:prstGeom prst="rect">
+            <a:avLst/>
+          </a:prstGeom>
+          <a:noFill/>
+        </p:spPr>
+        <p:txBody>
+          <a:bodyPr wrap="square">
+            <a:spAutoFit/>
+          </a:bodyPr>
+          <a:lstStyle/>
+          <a:p>
+            <a:pPr>
+              <a:defRPr sz="3000" b="1">
+                <a:solidFill>
+                  <a:srgbClr val="1F3A68"/>
+                </a:solidFill>
+              </a:defRPr>
+            </a:pPr>
+            <a:r>
+              <a:t>Next Actions</a:t>
+            </a:r>
+          </a:p>
+        </p:txBody>
+      </p:sp>
+      <p:sp>
+        <p:nvSpPr>
+          <p:cNvPr id="4" name="TextBox 3"/>
+          <p:cNvSpPr txBox="1"/>
+          <p:nvPr/>
+        </p:nvSpPr>
+        <p:spPr>
+          <a:xfrm>
+            <a:off x="457200" y="1463040"/>
+            <a:ext cx="11247120" cy="4754880"/>
+          </a:xfrm>
+          <a:prstGeom prst="rect">
+            <a:avLst/>
+          </a:prstGeom>
+          <a:noFill/>
+        </p:spPr>
+        <p:txBody>
+          <a:bodyPr wrap="square">
+            <a:spAutoFit/>
+          </a:bodyPr>
+          <a:lstStyle/>
+          <a:p>
+            <a:pPr>
+              <a:spcAft>
+                <a:spcPts val="800"/>
+              </a:spcAft>
+              <a:defRPr sz="2000">
+                <a:solidFill>
+                  <a:srgbClr val="445577"/>
+                </a:solidFill>
+              </a:defRPr>
+            </a:pPr>
+            <a:r>
+              <a:t>• Replace TBDs with measured/source-backed values.</a:t>
+            </a:r>
+          </a:p>
+          <a:p>
+            <a:pPr>
+              <a:spcAft>
+                <a:spcPts val="800"/>
+              </a:spcAft>
+              <a:defRPr sz="2000">
+                <a:solidFill>
+                  <a:srgbClr val="445577"/>
+                </a:solidFill>
+              </a:defRPr>
+            </a:pPr>
+            <a:r>
+              <a:t>• Verify live supplier price and availability before buying.</a:t>
+            </a:r>
+          </a:p>
+          <a:p>
+            <a:pPr>
+              <a:spcAft>
+                <a:spcPts val="800"/>
+              </a:spcAft>
+              <a:defRPr sz="2000">
+                <a:solidFill>
+                  <a:srgbClr val="445577"/>
+                </a:solidFill>
+              </a:defRPr>
+            </a:pPr>
+            <a:r>
+              <a:t>• Export final drawings and visual BOM images.</a:t>
+            </a:r>
+          </a:p>
+          <a:p>
+            <a:pPr>
+              <a:spcAft>
+                <a:spcPts val="800"/>
+              </a:spcAft>
+              <a:defRPr sz="2000">
+                <a:solidFill>
+                  <a:srgbClr val="445577"/>
+                </a:solidFill>
+              </a:defRPr>
+            </a:pPr>
+            <a:r>
+              <a:t>• Regenerate this deck and print packet after final edits.</a:t>
+            </a:r>
+          </a:p>
+        </p:txBody>
+      </p:sp>
+      <p:sp>
+        <p:nvSpPr>
+          <p:cNvPr id="5" name="TextBox 4"/>
+          <p:cNvSpPr txBox="1"/>
+          <p:nvPr/>
+        </p:nvSpPr>
+        <p:spPr>
+          <a:xfrm>
+            <a:off x="457200" y="6446520"/>
+            <a:ext cx="11247120" cy="274320"/>
+          </a:xfrm>
+          <a:prstGeom prst="rect">
+            <a:avLst/>
+          </a:prstGeom>
+          <a:noFill/>
+        </p:spPr>
+        <p:txBody>
+          <a:bodyPr wrap="none">
+            <a:spAutoFit/>
+          </a:bodyPr>
+          <a:lstStyle/>
+          <a:p>
+            <a:pPr>
+              <a:defRPr sz="1000">
+                <a:solidFill>
+                  <a:srgbClr val="445577"/>
+                </a:solidFill>
+              </a:defRPr>
+            </a:pPr>
+            <a:r>
+              <a:t>Slip-Cast Ceramic Ocarina (OCA-001) — v3 Smoke Test  |  Slide 13 of 13</a:t>
             </a:r>
           </a:p>
         </p:txBody>
@@ -4051,7 +4428,7 @@
               </a:defRPr>
             </a:pPr>
             <a:r>
-              <a:t>• See design.md for intent.</a:t>
+              <a:t>• Build a slip-cast ceramic Alto C 12-hole ocarina using a 3D-printed master and plaster mold workflow. The current table is focused on the standard "sweet potato" vessel-flute form, but the same model can be used as the baseline for sculptural vessel flutes.</a:t>
             </a:r>
           </a:p>
         </p:txBody>
@@ -4086,7 +4463,7 @@
               </a:defRPr>
             </a:pPr>
             <a:r>
-              <a:t>Slip-Cast Ceramic Ocarina (OCA-001) — Build Packet  |  Slide 2 of 12</a:t>
+              <a:t>Slip-Cast Ceramic Ocarina (OCA-001) — v3 Smoke Test  |  Slide 2 of 13</a:t>
             </a:r>
           </a:p>
         </p:txBody>
@@ -4182,7 +4559,7 @@
               </a:defRPr>
             </a:pPr>
             <a:r>
-              <a:t>How To Use This Packet</a:t>
+              <a:t>Physics Model</a:t>
             </a:r>
           </a:p>
         </p:txBody>
@@ -4220,52 +4597,23 @@
               </a:defRPr>
             </a:pPr>
             <a:r>
-              <a:t>• Start with design.md for intent and assumptions.</a:t>
+              <a:t>• Ocarinas behave primarily as Helmholtz resonators:</a:t>
             </a:r>
           </a:p>
           <a:p>
             <a:pPr>
               <a:spcAft>
-                <a:spcPts val="800"/>
+                <a:spcPts val="1000"/>
               </a:spcAft>
-              <a:defRPr sz="2000">
-                <a:solidFill>
-                  <a:srgbClr val="445577"/>
-                </a:solidFill>
-              </a:defRPr>
-            </a:pPr>
-            <a:r>
-              <a:t>• Use bom.csv, sourcing.csv, and cut-list.csv before buying or cutting.</a:t>
-            </a:r>
-          </a:p>
-          <a:p>
-            <a:pPr>
-              <a:spcAft>
-                <a:spcPts val="800"/>
-              </a:spcAft>
-              <a:defRPr sz="2000">
-                <a:solidFill>
-                  <a:srgbClr val="445577"/>
-                </a:solidFill>
-              </a:defRPr>
-            </a:pPr>
-            <a:r>
-              <a:t>• Use drawing-brief.md and CAD/CNC folders before machining.</a:t>
-            </a:r>
-          </a:p>
-          <a:p>
-            <a:pPr>
-              <a:spcAft>
-                <a:spcPts val="800"/>
-              </a:spcAft>
-              <a:defRPr sz="2000">
-                <a:solidFill>
-                  <a:srgbClr val="445577"/>
-                </a:solidFill>
-              </a:defRPr>
-            </a:pPr>
-            <a:r>
-              <a:t>• Print the packet for shopping, shop work, and validation.</a:t>
+              <a:defRPr sz="1600">
+                <a:solidFill>
+                  <a:srgbClr val="1F3A68"/>
+                </a:solidFill>
+                <a:latin typeface="Consolas"/>
+              </a:defRPr>
+            </a:pPr>
+            <a:r>
+              <a:t>f = c/(2*pi) * sqrt(A_open/(V_chamber * L_eff))</a:t>
             </a:r>
           </a:p>
         </p:txBody>
@@ -4300,7 +4648,7 @@
               </a:defRPr>
             </a:pPr>
             <a:r>
-              <a:t>Slip-Cast Ceramic Ocarina (OCA-001) — Build Packet  |  Slide 3 of 12</a:t>
+              <a:t>Slip-Cast Ceramic Ocarina (OCA-001) — v3 Smoke Test  |  Slide 3 of 13</a:t>
             </a:r>
           </a:p>
         </p:txBody>
@@ -4396,7 +4744,7 @@
               </a:defRPr>
             </a:pPr>
             <a:r>
-              <a:t>File Map</a:t>
+              <a:t>How To Use This Packet</a:t>
             </a:r>
           </a:p>
         </p:txBody>
@@ -4434,7 +4782,7 @@
               </a:defRPr>
             </a:pPr>
             <a:r>
-              <a:t>• design.md: Project intent, catalog metadata, assumptions, and validation plan.</a:t>
+              <a:t>• Start with design.md for intent and assumptions.</a:t>
             </a:r>
           </a:p>
           <a:p>
@@ -4449,7 +4797,7 @@
               </a:defRPr>
             </a:pPr>
             <a:r>
-              <a:t>• bom.csv: Starter bill of materials with part categories, quantities, drawing refs, and notes.</a:t>
+              <a:t>• Use bom.csv, sourcing.csv, and cut-list.csv before buying or cutting.</a:t>
             </a:r>
           </a:p>
           <a:p>
@@ -4464,7 +4812,7 @@
               </a:defRPr>
             </a:pPr>
             <a:r>
-              <a:t>• sourcing.csv: Supplier/search tracker with specs, price/date fields, lead time, substitutes, and risks.</a:t>
+              <a:t>• Use drawing-brief.md and CAD/CNC folders before machining.</a:t>
             </a:r>
           </a:p>
           <a:p>
@@ -4479,67 +4827,7 @@
               </a:defRPr>
             </a:pPr>
             <a:r>
-              <a:t>• cut-list.csv: Rough/final stock sizes, material, grain/orientation, operations, yield, and offcuts.</a:t>
-            </a:r>
-          </a:p>
-          <a:p>
-            <a:pPr>
-              <a:spcAft>
-                <a:spcPts val="800"/>
-              </a:spcAft>
-              <a:defRPr sz="2000">
-                <a:solidFill>
-                  <a:srgbClr val="445577"/>
-                </a:solidFill>
-              </a:defRPr>
-            </a:pPr>
-            <a:r>
-              <a:t>• drawing-brief.md: Manufacturing drawing and technical product sketch brief.</a:t>
-            </a:r>
-          </a:p>
-          <a:p>
-            <a:pPr>
-              <a:spcAft>
-                <a:spcPts val="800"/>
-              </a:spcAft>
-              <a:defRPr sz="2000">
-                <a:solidFill>
-                  <a:srgbClr val="445577"/>
-                </a:solidFill>
-              </a:defRPr>
-            </a:pPr>
-            <a:r>
-              <a:t>• assembly-manual.md: Shop-facing sequence, tools, fixtures, safety, tuning, finishing, and maintenance notes.</a:t>
-            </a:r>
-          </a:p>
-          <a:p>
-            <a:pPr>
-              <a:spcAft>
-                <a:spcPts val="800"/>
-              </a:spcAft>
-              <a:defRPr sz="2000">
-                <a:solidFill>
-                  <a:srgbClr val="445577"/>
-                </a:solidFill>
-              </a:defRPr>
-            </a:pPr>
-            <a:r>
-              <a:t>• validation.csv: Target/measured values, tolerance, environment, result, and tuning/build action log.</a:t>
-            </a:r>
-          </a:p>
-          <a:p>
-            <a:pPr>
-              <a:spcAft>
-                <a:spcPts val="800"/>
-              </a:spcAft>
-              <a:defRPr sz="2000">
-                <a:solidFill>
-                  <a:srgbClr val="445577"/>
-                </a:solidFill>
-              </a:defRPr>
-            </a:pPr>
-            <a:r>
-              <a:t>• supplier-rfq.md: Supplier email/request-for-quote starter.</a:t>
+              <a:t>• Print the packet for shopping, shop work, and validation.</a:t>
             </a:r>
           </a:p>
         </p:txBody>
@@ -4574,7 +4862,7 @@
               </a:defRPr>
             </a:pPr>
             <a:r>
-              <a:t>Slip-Cast Ceramic Ocarina (OCA-001) — Build Packet  |  Slide 4 of 12</a:t>
+              <a:t>Slip-Cast Ceramic Ocarina (OCA-001) — v3 Smoke Test  |  Slide 4 of 13</a:t>
             </a:r>
           </a:p>
         </p:txBody>
@@ -4670,7 +4958,7 @@
               </a:defRPr>
             </a:pPr>
             <a:r>
-              <a:t>Build Workflow</a:t>
+              <a:t>File Map</a:t>
             </a:r>
           </a:p>
         </p:txBody>
@@ -4708,7 +4996,7 @@
               </a:defRPr>
             </a:pPr>
             <a:r>
-              <a:t>• Design and assumptions</a:t>
+              <a:t>• design.md: Project intent, catalog metadata, assumptions, and validation plan.</a:t>
             </a:r>
           </a:p>
           <a:p>
@@ -4723,7 +5011,7 @@
               </a:defRPr>
             </a:pPr>
             <a:r>
-              <a:t>• Source materials and hardware</a:t>
+              <a:t>• bom.csv: Starter bill of materials with part categories, quantities, drawing refs, and notes.</a:t>
             </a:r>
           </a:p>
           <a:p>
@@ -4738,7 +5026,7 @@
               </a:defRPr>
             </a:pPr>
             <a:r>
-              <a:t>• Prepare stock, fixtures, and CNC/laser/lathe setup</a:t>
+              <a:t>• sourcing.csv: Supplier/search tracker with specs, price/date fields, lead time, substitutes, and risks.</a:t>
             </a:r>
           </a:p>
           <a:p>
@@ -4753,7 +5041,67 @@
               </a:defRPr>
             </a:pPr>
             <a:r>
-              <a:t>• Assemble, tune, finish, and validate</a:t>
+              <a:t>• cut-list.csv: Rough/final stock sizes, material, grain/orientation, operations, yield, and offcuts.</a:t>
+            </a:r>
+          </a:p>
+          <a:p>
+            <a:pPr>
+              <a:spcAft>
+                <a:spcPts val="800"/>
+              </a:spcAft>
+              <a:defRPr sz="2000">
+                <a:solidFill>
+                  <a:srgbClr val="445577"/>
+                </a:solidFill>
+              </a:defRPr>
+            </a:pPr>
+            <a:r>
+              <a:t>• drawing-brief.md: Manufacturing drawing and technical product sketch brief.</a:t>
+            </a:r>
+          </a:p>
+          <a:p>
+            <a:pPr>
+              <a:spcAft>
+                <a:spcPts val="800"/>
+              </a:spcAft>
+              <a:defRPr sz="2000">
+                <a:solidFill>
+                  <a:srgbClr val="445577"/>
+                </a:solidFill>
+              </a:defRPr>
+            </a:pPr>
+            <a:r>
+              <a:t>• assembly-manual.md: Shop-facing sequence, tools, fixtures, safety, tuning, finishing, and maintenance notes.</a:t>
+            </a:r>
+          </a:p>
+          <a:p>
+            <a:pPr>
+              <a:spcAft>
+                <a:spcPts val="800"/>
+              </a:spcAft>
+              <a:defRPr sz="2000">
+                <a:solidFill>
+                  <a:srgbClr val="445577"/>
+                </a:solidFill>
+              </a:defRPr>
+            </a:pPr>
+            <a:r>
+              <a:t>• validation.csv: Target/measured values, tolerance, environment, result, and tuning/build action log.</a:t>
+            </a:r>
+          </a:p>
+          <a:p>
+            <a:pPr>
+              <a:spcAft>
+                <a:spcPts val="800"/>
+              </a:spcAft>
+              <a:defRPr sz="2000">
+                <a:solidFill>
+                  <a:srgbClr val="445577"/>
+                </a:solidFill>
+              </a:defRPr>
+            </a:pPr>
+            <a:r>
+              <a:t>• supplier-rfq.md: Supplier email/request-for-quote starter.</a:t>
             </a:r>
           </a:p>
         </p:txBody>
@@ -4788,7 +5136,7 @@
               </a:defRPr>
             </a:pPr>
             <a:r>
-              <a:t>Slip-Cast Ceramic Ocarina (OCA-001) — Build Packet  |  Slide 5 of 12</a:t>
+              <a:t>Slip-Cast Ceramic Ocarina (OCA-001) — v3 Smoke Test  |  Slide 5 of 13</a:t>
             </a:r>
           </a:p>
         </p:txBody>
@@ -4884,7 +5232,7 @@
               </a:defRPr>
             </a:pPr>
             <a:r>
-              <a:t>Sourcing And BOM</a:t>
+              <a:t>Build Workflow</a:t>
             </a:r>
           </a:p>
         </p:txBody>
@@ -4922,7 +5270,7 @@
               </a:defRPr>
             </a:pPr>
             <a:r>
-              <a:t>• BOM gives part categories and drawing references.</a:t>
+              <a:t>• Design and assumptions</a:t>
             </a:r>
           </a:p>
           <a:p>
@@ -4937,7 +5285,7 @@
               </a:defRPr>
             </a:pPr>
             <a:r>
-              <a:t>• Sourcing tracks search terms, supplier candidates, price/date, lead time, substitutions.</a:t>
+              <a:t>• Source materials and hardware</a:t>
             </a:r>
           </a:p>
           <a:p>
@@ -4952,7 +5300,22 @@
               </a:defRPr>
             </a:pPr>
             <a:r>
-              <a:t>• Visual BOM brief turns the parts list into a presentation-ready image board.</a:t>
+              <a:t>• Prepare stock, fixtures, and CNC/laser/lathe setup</a:t>
+            </a:r>
+          </a:p>
+          <a:p>
+            <a:pPr>
+              <a:spcAft>
+                <a:spcPts val="800"/>
+              </a:spcAft>
+              <a:defRPr sz="2000">
+                <a:solidFill>
+                  <a:srgbClr val="445577"/>
+                </a:solidFill>
+              </a:defRPr>
+            </a:pPr>
+            <a:r>
+              <a:t>• Assemble, tune, finish, and validate</a:t>
             </a:r>
           </a:p>
         </p:txBody>
@@ -4987,7 +5350,7 @@
               </a:defRPr>
             </a:pPr>
             <a:r>
-              <a:t>Slip-Cast Ceramic Ocarina (OCA-001) — Build Packet  |  Slide 6 of 12</a:t>
+              <a:t>Slip-Cast Ceramic Ocarina (OCA-001) — v3 Smoke Test  |  Slide 6 of 13</a:t>
             </a:r>
           </a:p>
         </p:txBody>
@@ -5083,7 +5446,7 @@
               </a:defRPr>
             </a:pPr>
             <a:r>
-              <a:t>Shop Packet</a:t>
+              <a:t>Sourcing And BOM</a:t>
             </a:r>
           </a:p>
         </p:txBody>
@@ -5121,7 +5484,7 @@
               </a:defRPr>
             </a:pPr>
             <a:r>
-              <a:t>• Cut list for lumber/sheet/blank planning.</a:t>
+              <a:t>• BOM gives part categories and drawing references.</a:t>
             </a:r>
           </a:p>
           <a:p>
@@ -5136,7 +5499,7 @@
               </a:defRPr>
             </a:pPr>
             <a:r>
-              <a:t>• Assembly manual for away-from-keyboard work.</a:t>
+              <a:t>• Sourcing tracks search terms, supplier candidates, price/date, lead time, substitutions.</a:t>
             </a:r>
           </a:p>
           <a:p>
@@ -5151,7 +5514,7 @@
               </a:defRPr>
             </a:pPr>
             <a:r>
-              <a:t>• Validation sheet for measured dimensions, tuning, pass/fail checks.</a:t>
+              <a:t>• Visual BOM brief turns the parts list into a presentation-ready image board.</a:t>
             </a:r>
           </a:p>
         </p:txBody>
@@ -5186,7 +5549,7 @@
               </a:defRPr>
             </a:pPr>
             <a:r>
-              <a:t>Slip-Cast Ceramic Ocarina (OCA-001) — Build Packet  |  Slide 7 of 12</a:t>
+              <a:t>Slip-Cast Ceramic Ocarina (OCA-001) — v3 Smoke Test  |  Slide 7 of 13</a:t>
             </a:r>
           </a:p>
         </p:txBody>
@@ -5282,7 +5645,7 @@
               </a:defRPr>
             </a:pPr>
             <a:r>
-              <a:t>Drawings, CAD, CNC</a:t>
+              <a:t>Shop Packet</a:t>
             </a:r>
           </a:p>
         </p:txBody>
@@ -5320,7 +5683,7 @@
               </a:defRPr>
             </a:pPr>
             <a:r>
-              <a:t>• drawing-brief.md defines required views, dimensions, datums, sketch intent.</a:t>
+              <a:t>• Cut list for lumber/sheet/blank planning.</a:t>
             </a:r>
           </a:p>
           <a:p>
@@ -5335,7 +5698,7 @@
               </a:defRPr>
             </a:pPr>
             <a:r>
-              <a:t>• cad/ holds models and design tables.</a:t>
+              <a:t>• Assembly manual for away-from-keyboard work.</a:t>
             </a:r>
           </a:p>
           <a:p>
@@ -5350,22 +5713,7 @@
               </a:defRPr>
             </a:pPr>
             <a:r>
-              <a:t>• cnc/ holds CAM, toolpaths, setup sheets, dry-run notes.</a:t>
-            </a:r>
-          </a:p>
-          <a:p>
-            <a:pPr>
-              <a:spcAft>
-                <a:spcPts val="800"/>
-              </a:spcAft>
-              <a:defRPr sz="2000">
-                <a:solidFill>
-                  <a:srgbClr val="445577"/>
-                </a:solidFill>
-              </a:defRPr>
-            </a:pPr>
-            <a:r>
-              <a:t>• drawings/ holds PDFs, SVGs, DXFs, drawing exports.</a:t>
+              <a:t>• Validation sheet for measured dimensions, tuning, pass/fail checks.</a:t>
             </a:r>
           </a:p>
         </p:txBody>
@@ -5400,7 +5748,7 @@
               </a:defRPr>
             </a:pPr>
             <a:r>
-              <a:t>Slip-Cast Ceramic Ocarina (OCA-001) — Build Packet  |  Slide 8 of 12</a:t>
+              <a:t>Slip-Cast Ceramic Ocarina (OCA-001) — v3 Smoke Test  |  Slide 8 of 13</a:t>
             </a:r>
           </a:p>
         </p:txBody>
@@ -5496,7 +5844,7 @@
               </a:defRPr>
             </a:pPr>
             <a:r>
-              <a:t>Images And Screenshots</a:t>
+              <a:t>Drawings, CAD, CNC</a:t>
             </a:r>
           </a:p>
         </p:txBody>
@@ -5510,7 +5858,7 @@
         <p:spPr>
           <a:xfrm>
             <a:off x="457200" y="1463040"/>
-            <a:ext cx="11247120" cy="4754880"/>
+            <a:ext cx="5943600" cy="4754880"/>
           </a:xfrm>
           <a:prstGeom prst="rect">
             <a:avLst/>
@@ -5534,7 +5882,7 @@
               </a:defRPr>
             </a:pPr>
             <a:r>
-              <a:t>• images/exploded-view-concept.png</a:t>
+              <a:t>• drawing-brief.md defines required views, dimensions, datums, sketch intent.</a:t>
             </a:r>
           </a:p>
           <a:p>
@@ -5549,7 +5897,7 @@
               </a:defRPr>
             </a:pPr>
             <a:r>
-              <a:t>• images/hero-concept.png</a:t>
+              <a:t>• cad/ holds models and design tables.</a:t>
             </a:r>
           </a:p>
           <a:p>
@@ -5564,14 +5912,206 @@
               </a:defRPr>
             </a:pPr>
             <a:r>
-              <a:t>• images/mold-cross-section-concept.png</a:t>
-            </a:r>
-          </a:p>
-        </p:txBody>
-      </p:sp>
-      <p:sp>
-        <p:nvSpPr>
-          <p:cNvPr id="5" name="TextBox 4"/>
+              <a:t>• cnc/ holds CAM, toolpaths, setup sheets, dry-run notes.</a:t>
+            </a:r>
+          </a:p>
+          <a:p>
+            <a:pPr>
+              <a:spcAft>
+                <a:spcPts val="800"/>
+              </a:spcAft>
+              <a:defRPr sz="2000">
+                <a:solidFill>
+                  <a:srgbClr val="445577"/>
+                </a:solidFill>
+              </a:defRPr>
+            </a:pPr>
+            <a:r>
+              <a:t>• drawings/ holds PDFs, SVGs, DXFs, drawing exports.</a:t>
+            </a:r>
+          </a:p>
+        </p:txBody>
+      </p:sp>
+      <p:pic>
+        <p:nvPicPr>
+          <p:cNvPr id="5" name="Picture 4" descr="ocarina-body-section.png"/>
+          <p:cNvPicPr>
+            <a:picLocks noChangeAspect="1"/>
+          </p:cNvPicPr>
+          <p:nvPr/>
+        </p:nvPicPr>
+        <p:blipFill>
+          <a:blip r:embed="rId2"/>
+          <a:stretch>
+            <a:fillRect/>
+          </a:stretch>
+        </p:blipFill>
+        <p:spPr>
+          <a:xfrm>
+            <a:off x="6737985" y="1463040"/>
+            <a:ext cx="2388870" cy="1783080"/>
+          </a:xfrm>
+          <a:prstGeom prst="rect">
+            <a:avLst/>
+          </a:prstGeom>
+        </p:spPr>
+      </p:pic>
+      <p:sp>
+        <p:nvSpPr>
+          <p:cNvPr id="6" name="TextBox 5"/>
+          <p:cNvSpPr txBox="1"/>
+          <p:nvPr/>
+        </p:nvSpPr>
+        <p:spPr>
+          <a:xfrm>
+            <a:off x="6675120" y="3246120"/>
+            <a:ext cx="2514600" cy="594360"/>
+          </a:xfrm>
+          <a:prstGeom prst="rect">
+            <a:avLst/>
+          </a:prstGeom>
+          <a:noFill/>
+        </p:spPr>
+        <p:txBody>
+          <a:bodyPr wrap="square">
+            <a:spAutoFit/>
+          </a:bodyPr>
+          <a:lstStyle/>
+          <a:p>
+            <a:pPr>
+              <a:defRPr sz="900">
+                <a:solidFill>
+                  <a:srgbClr val="445577"/>
+                </a:solidFill>
+              </a:defRPr>
+            </a:pPr>
+            <a:r>
+              <a:t>ocarina-body-section.png</a:t>
+            </a:r>
+          </a:p>
+        </p:txBody>
+      </p:sp>
+      <p:pic>
+        <p:nvPicPr>
+          <p:cNvPr id="7" name="Picture 6" descr="ocarina-hole-layout.png"/>
+          <p:cNvPicPr>
+            <a:picLocks noChangeAspect="1"/>
+          </p:cNvPicPr>
+          <p:nvPr/>
+        </p:nvPicPr>
+        <p:blipFill>
+          <a:blip r:embed="rId3"/>
+          <a:stretch>
+            <a:fillRect/>
+          </a:stretch>
+        </p:blipFill>
+        <p:spPr>
+          <a:xfrm>
+            <a:off x="9252585" y="1463040"/>
+            <a:ext cx="2388870" cy="1783080"/>
+          </a:xfrm>
+          <a:prstGeom prst="rect">
+            <a:avLst/>
+          </a:prstGeom>
+        </p:spPr>
+      </p:pic>
+      <p:sp>
+        <p:nvSpPr>
+          <p:cNvPr id="8" name="TextBox 7"/>
+          <p:cNvSpPr txBox="1"/>
+          <p:nvPr/>
+        </p:nvSpPr>
+        <p:spPr>
+          <a:xfrm>
+            <a:off x="9189720" y="3246120"/>
+            <a:ext cx="2514600" cy="594360"/>
+          </a:xfrm>
+          <a:prstGeom prst="rect">
+            <a:avLst/>
+          </a:prstGeom>
+          <a:noFill/>
+        </p:spPr>
+        <p:txBody>
+          <a:bodyPr wrap="square">
+            <a:spAutoFit/>
+          </a:bodyPr>
+          <a:lstStyle/>
+          <a:p>
+            <a:pPr>
+              <a:defRPr sz="900">
+                <a:solidFill>
+                  <a:srgbClr val="445577"/>
+                </a:solidFill>
+              </a:defRPr>
+            </a:pPr>
+            <a:r>
+              <a:t>ocarina-hole-layout.png</a:t>
+            </a:r>
+          </a:p>
+        </p:txBody>
+      </p:sp>
+      <p:pic>
+        <p:nvPicPr>
+          <p:cNvPr id="9" name="Picture 8" descr="ocarina-mold-schematic.png"/>
+          <p:cNvPicPr>
+            <a:picLocks noChangeAspect="1"/>
+          </p:cNvPicPr>
+          <p:nvPr/>
+        </p:nvPicPr>
+        <p:blipFill>
+          <a:blip r:embed="rId4"/>
+          <a:stretch>
+            <a:fillRect/>
+          </a:stretch>
+        </p:blipFill>
+        <p:spPr>
+          <a:xfrm>
+            <a:off x="6737985" y="3840480"/>
+            <a:ext cx="2388870" cy="1783080"/>
+          </a:xfrm>
+          <a:prstGeom prst="rect">
+            <a:avLst/>
+          </a:prstGeom>
+        </p:spPr>
+      </p:pic>
+      <p:sp>
+        <p:nvSpPr>
+          <p:cNvPr id="10" name="TextBox 9"/>
+          <p:cNvSpPr txBox="1"/>
+          <p:nvPr/>
+        </p:nvSpPr>
+        <p:spPr>
+          <a:xfrm>
+            <a:off x="6675120" y="5623560"/>
+            <a:ext cx="2514600" cy="594360"/>
+          </a:xfrm>
+          <a:prstGeom prst="rect">
+            <a:avLst/>
+          </a:prstGeom>
+          <a:noFill/>
+        </p:spPr>
+        <p:txBody>
+          <a:bodyPr wrap="square">
+            <a:spAutoFit/>
+          </a:bodyPr>
+          <a:lstStyle/>
+          <a:p>
+            <a:pPr>
+              <a:defRPr sz="900">
+                <a:solidFill>
+                  <a:srgbClr val="445577"/>
+                </a:solidFill>
+              </a:defRPr>
+            </a:pPr>
+            <a:r>
+              <a:t>ocarina-mold-schematic.png</a:t>
+            </a:r>
+          </a:p>
+        </p:txBody>
+      </p:sp>
+      <p:sp>
+        <p:nvSpPr>
+          <p:cNvPr id="11" name="TextBox 10"/>
           <p:cNvSpPr txBox="1"/>
           <p:nvPr/>
         </p:nvSpPr>
@@ -5599,7 +6139,7 @@
               </a:defRPr>
             </a:pPr>
             <a:r>
-              <a:t>Slip-Cast Ceramic Ocarina (OCA-001) — Build Packet  |  Slide 9 of 12</a:t>
+              <a:t>Slip-Cast Ceramic Ocarina (OCA-001) — v3 Smoke Test  |  Slide 9 of 13</a:t>
             </a:r>
           </a:p>
         </p:txBody>

--- a/capstone-deck.pptx
+++ b/capstone-deck.pptx
@@ -3173,7 +3173,7 @@
               </a:defRPr>
             </a:pPr>
             <a:r>
-              <a:t>Slip-Cast Ceramic Ocarina (OCA-001) — v3 Smoke Test</a:t>
+              <a:t>Slip-Cast Ceramic Ocarina (OCA-001) — v3.1 smoke test</a:t>
             </a:r>
           </a:p>
         </p:txBody>
@@ -3276,7 +3276,7 @@
               </a:defRPr>
             </a:pPr>
             <a:r>
-              <a:t>Slip-Cast Ceramic Ocarina (OCA-001) — v3 Smoke Test  |  Slide 1 of 13</a:t>
+              <a:t>Slip-Cast Ceramic Ocarina (OCA-001) — v3.1 smoke test  |  Slide 1 of 13</a:t>
             </a:r>
           </a:p>
         </p:txBody>
@@ -3410,7 +3410,7 @@
               </a:defRPr>
             </a:pPr>
             <a:r>
-              <a:t>• images/exploded-view-concept.png</a:t>
+              <a:t>• images\exploded-view-concept.png</a:t>
             </a:r>
           </a:p>
           <a:p>
@@ -3425,7 +3425,7 @@
               </a:defRPr>
             </a:pPr>
             <a:r>
-              <a:t>• images/hero-concept.png</a:t>
+              <a:t>• images\exploded-view-concept.svg</a:t>
             </a:r>
           </a:p>
           <a:p>
@@ -3440,7 +3440,52 @@
               </a:defRPr>
             </a:pPr>
             <a:r>
-              <a:t>• images/mold-cross-section-concept.png</a:t>
+              <a:t>• images\hero-concept.png</a:t>
+            </a:r>
+          </a:p>
+          <a:p>
+            <a:pPr>
+              <a:spcAft>
+                <a:spcPts val="800"/>
+              </a:spcAft>
+              <a:defRPr sz="2000">
+                <a:solidFill>
+                  <a:srgbClr val="445577"/>
+                </a:solidFill>
+              </a:defRPr>
+            </a:pPr>
+            <a:r>
+              <a:t>• images\hero-concept.svg</a:t>
+            </a:r>
+          </a:p>
+          <a:p>
+            <a:pPr>
+              <a:spcAft>
+                <a:spcPts val="800"/>
+              </a:spcAft>
+              <a:defRPr sz="2000">
+                <a:solidFill>
+                  <a:srgbClr val="445577"/>
+                </a:solidFill>
+              </a:defRPr>
+            </a:pPr>
+            <a:r>
+              <a:t>• images\mold-cross-section-concept.png</a:t>
+            </a:r>
+          </a:p>
+          <a:p>
+            <a:pPr>
+              <a:spcAft>
+                <a:spcPts val="800"/>
+              </a:spcAft>
+              <a:defRPr sz="2000">
+                <a:solidFill>
+                  <a:srgbClr val="445577"/>
+                </a:solidFill>
+              </a:defRPr>
+            </a:pPr>
+            <a:r>
+              <a:t>• images\mold-cross-section-concept.svg</a:t>
             </a:r>
           </a:p>
         </p:txBody>
@@ -3652,7 +3697,7 @@
               </a:defRPr>
             </a:pPr>
             <a:r>
-              <a:t>Slip-Cast Ceramic Ocarina (OCA-001) — v3 Smoke Test  |  Slide 10 of 13</a:t>
+              <a:t>Slip-Cast Ceramic Ocarina (OCA-001) — v3.1 smoke test  |  Slide 10 of 13</a:t>
             </a:r>
           </a:p>
         </p:txBody>
@@ -3866,7 +3911,7 @@
               </a:defRPr>
             </a:pPr>
             <a:r>
-              <a:t>Slip-Cast Ceramic Ocarina (OCA-001) — v3 Smoke Test  |  Slide 11 of 13</a:t>
+              <a:t>Slip-Cast Ceramic Ocarina (OCA-001) — v3.1 smoke test  |  Slide 11 of 13</a:t>
             </a:r>
           </a:p>
         </p:txBody>
@@ -4080,7 +4125,7 @@
               </a:defRPr>
             </a:pPr>
             <a:r>
-              <a:t>Slip-Cast Ceramic Ocarina (OCA-001) — v3 Smoke Test  |  Slide 12 of 13</a:t>
+              <a:t>Slip-Cast Ceramic Ocarina (OCA-001) — v3.1 smoke test  |  Slide 12 of 13</a:t>
             </a:r>
           </a:p>
         </p:txBody>
@@ -4294,7 +4339,7 @@
               </a:defRPr>
             </a:pPr>
             <a:r>
-              <a:t>Slip-Cast Ceramic Ocarina (OCA-001) — v3 Smoke Test  |  Slide 13 of 13</a:t>
+              <a:t>Slip-Cast Ceramic Ocarina (OCA-001) — v3.1 smoke test  |  Slide 13 of 13</a:t>
             </a:r>
           </a:p>
         </p:txBody>
@@ -4463,7 +4508,7 @@
               </a:defRPr>
             </a:pPr>
             <a:r>
-              <a:t>Slip-Cast Ceramic Ocarina (OCA-001) — v3 Smoke Test  |  Slide 2 of 13</a:t>
+              <a:t>Slip-Cast Ceramic Ocarina (OCA-001) — v3.1 smoke test  |  Slide 2 of 13</a:t>
             </a:r>
           </a:p>
         </p:txBody>
@@ -4648,7 +4693,7 @@
               </a:defRPr>
             </a:pPr>
             <a:r>
-              <a:t>Slip-Cast Ceramic Ocarina (OCA-001) — v3 Smoke Test  |  Slide 3 of 13</a:t>
+              <a:t>Slip-Cast Ceramic Ocarina (OCA-001) — v3.1 smoke test  |  Slide 3 of 13</a:t>
             </a:r>
           </a:p>
         </p:txBody>
@@ -4862,7 +4907,7 @@
               </a:defRPr>
             </a:pPr>
             <a:r>
-              <a:t>Slip-Cast Ceramic Ocarina (OCA-001) — v3 Smoke Test  |  Slide 4 of 13</a:t>
+              <a:t>Slip-Cast Ceramic Ocarina (OCA-001) — v3.1 smoke test  |  Slide 4 of 13</a:t>
             </a:r>
           </a:p>
         </p:txBody>
@@ -5136,7 +5181,7 @@
               </a:defRPr>
             </a:pPr>
             <a:r>
-              <a:t>Slip-Cast Ceramic Ocarina (OCA-001) — v3 Smoke Test  |  Slide 5 of 13</a:t>
+              <a:t>Slip-Cast Ceramic Ocarina (OCA-001) — v3.1 smoke test  |  Slide 5 of 13</a:t>
             </a:r>
           </a:p>
         </p:txBody>
@@ -5350,7 +5395,7 @@
               </a:defRPr>
             </a:pPr>
             <a:r>
-              <a:t>Slip-Cast Ceramic Ocarina (OCA-001) — v3 Smoke Test  |  Slide 6 of 13</a:t>
+              <a:t>Slip-Cast Ceramic Ocarina (OCA-001) — v3.1 smoke test  |  Slide 6 of 13</a:t>
             </a:r>
           </a:p>
         </p:txBody>
@@ -5549,7 +5594,7 @@
               </a:defRPr>
             </a:pPr>
             <a:r>
-              <a:t>Slip-Cast Ceramic Ocarina (OCA-001) — v3 Smoke Test  |  Slide 7 of 13</a:t>
+              <a:t>Slip-Cast Ceramic Ocarina (OCA-001) — v3.1 smoke test  |  Slide 7 of 13</a:t>
             </a:r>
           </a:p>
         </p:txBody>
@@ -5748,7 +5793,7 @@
               </a:defRPr>
             </a:pPr>
             <a:r>
-              <a:t>Slip-Cast Ceramic Ocarina (OCA-001) — v3 Smoke Test  |  Slide 8 of 13</a:t>
+              <a:t>Slip-Cast Ceramic Ocarina (OCA-001) — v3.1 smoke test  |  Slide 8 of 13</a:t>
             </a:r>
           </a:p>
         </p:txBody>
@@ -6139,7 +6184,7 @@
               </a:defRPr>
             </a:pPr>
             <a:r>
-              <a:t>Slip-Cast Ceramic Ocarina (OCA-001) — v3 Smoke Test  |  Slide 9 of 13</a:t>
+              <a:t>Slip-Cast Ceramic Ocarina (OCA-001) — v3.1 smoke test  |  Slide 9 of 13</a:t>
             </a:r>
           </a:p>
         </p:txBody>
